--- a/assets/images/simple_rbm_introduction/fig.pptx
+++ b/assets/images/simple_rbm_introduction/fig.pptx
@@ -6,6 +6,7 @@
   </p:sldMasterIdLst>
   <p:sldIdLst>
     <p:sldId id="256" r:id="rId2"/>
+    <p:sldId id="257" r:id="rId3"/>
   </p:sldIdLst>
   <p:sldSz cx="12192000" cy="6858000"/>
   <p:notesSz cx="6858000" cy="9144000"/>
@@ -104,6 +105,11 @@
       </a:defRPr>
     </a:lvl9pPr>
   </p:defaultTextStyle>
+  <p:extLst>
+    <p:ext uri="{EFAFB233-063F-42B5-8137-9DF3F51BA10A}">
+      <p15:sldGuideLst xmlns:p15="http://schemas.microsoft.com/office/powerpoint/2012/main"/>
+    </p:ext>
+  </p:extLst>
 </p:presentation>
 </file>
 
@@ -470,10 +476,652 @@
           <a:chExt cx="0" cy="0"/>
         </a:xfrm>
       </p:grpSpPr>
+      <p:pic>
+        <p:nvPicPr>
+          <p:cNvPr id="33" name="図 32">
+            <a:extLst>
+              <a:ext uri="{FF2B5EF4-FFF2-40B4-BE49-F238E27FC236}">
+                <a16:creationId xmlns:a16="http://schemas.microsoft.com/office/drawing/2014/main" id="{D92AB08B-F0D4-DAF1-34A8-A6DD1B9EA42B}"/>
+              </a:ext>
+            </a:extLst>
+          </p:cNvPr>
+          <p:cNvPicPr>
+            <a:picLocks noChangeAspect="1"/>
+          </p:cNvPicPr>
+          <p:nvPr/>
+        </p:nvPicPr>
+        <p:blipFill>
+          <a:blip r:embed="rId2"/>
+          <a:stretch>
+            <a:fillRect/>
+          </a:stretch>
+        </p:blipFill>
+        <p:spPr>
+          <a:xfrm>
+            <a:off x="1752257" y="1553347"/>
+            <a:ext cx="5969000" cy="2095500"/>
+          </a:xfrm>
+          <a:prstGeom prst="rect">
+            <a:avLst/>
+          </a:prstGeom>
+        </p:spPr>
+      </p:pic>
     </p:spTree>
     <p:extLst>
       <p:ext uri="{BB962C8B-B14F-4D97-AF65-F5344CB8AC3E}">
         <p14:creationId xmlns:p14="http://schemas.microsoft.com/office/powerpoint/2010/main" val="3385175696"/>
+      </p:ext>
+    </p:extLst>
+  </p:cSld>
+  <p:clrMapOvr>
+    <a:masterClrMapping/>
+  </p:clrMapOvr>
+</p:sld>
+</file>
+
+<file path=ppt/slides/slide2.xml><?xml version="1.0" encoding="utf-8"?>
+<p:sld xmlns:a="http://schemas.openxmlformats.org/drawingml/2006/main" xmlns:r="http://schemas.openxmlformats.org/officeDocument/2006/relationships" xmlns:p="http://schemas.openxmlformats.org/presentationml/2006/main">
+  <p:cSld>
+    <p:spTree>
+      <p:nvGrpSpPr>
+        <p:cNvPr id="1" name=""/>
+        <p:cNvGrpSpPr/>
+        <p:nvPr/>
+      </p:nvGrpSpPr>
+      <p:grpSpPr>
+        <a:xfrm>
+          <a:off x="0" y="0"/>
+          <a:ext cx="0" cy="0"/>
+          <a:chOff x="0" y="0"/>
+          <a:chExt cx="0" cy="0"/>
+        </a:xfrm>
+      </p:grpSpPr>
+      <p:pic>
+        <p:nvPicPr>
+          <p:cNvPr id="1026" name="Picture 2" descr="空白の紙を持った男性のイラスト">
+            <a:extLst>
+              <a:ext uri="{FF2B5EF4-FFF2-40B4-BE49-F238E27FC236}">
+                <a16:creationId xmlns:a16="http://schemas.microsoft.com/office/drawing/2014/main" id="{0D56BC19-3ADB-6069-7946-C17C5B88A363}"/>
+              </a:ext>
+            </a:extLst>
+          </p:cNvPr>
+          <p:cNvPicPr>
+            <a:picLocks noChangeAspect="1" noChangeArrowheads="1"/>
+          </p:cNvPicPr>
+          <p:nvPr/>
+        </p:nvPicPr>
+        <p:blipFill>
+          <a:blip r:embed="rId2">
+            <a:extLst>
+              <a:ext uri="{28A0092B-C50C-407E-A947-70E740481C1C}">
+                <a14:useLocalDpi xmlns:a14="http://schemas.microsoft.com/office/drawing/2010/main" val="0"/>
+              </a:ext>
+            </a:extLst>
+          </a:blip>
+          <a:srcRect/>
+          <a:stretch>
+            <a:fillRect/>
+          </a:stretch>
+        </p:blipFill>
+        <p:spPr bwMode="auto">
+          <a:xfrm>
+            <a:off x="5983807" y="889000"/>
+            <a:ext cx="1790700" cy="2540000"/>
+          </a:xfrm>
+          <a:prstGeom prst="rect">
+            <a:avLst/>
+          </a:prstGeom>
+          <a:noFill/>
+          <a:extLst>
+            <a:ext uri="{909E8E84-426E-40DD-AFC4-6F175D3DCCD1}">
+              <a14:hiddenFill xmlns:a14="http://schemas.microsoft.com/office/drawing/2010/main">
+                <a:solidFill>
+                  <a:srgbClr val="FFFFFF"/>
+                </a:solidFill>
+              </a14:hiddenFill>
+            </a:ext>
+          </a:extLst>
+        </p:spPr>
+      </p:pic>
+      <p:pic>
+        <p:nvPicPr>
+          <p:cNvPr id="1028" name="Picture 4" descr="五感のイラスト（視覚・男性）">
+            <a:extLst>
+              <a:ext uri="{FF2B5EF4-FFF2-40B4-BE49-F238E27FC236}">
+                <a16:creationId xmlns:a16="http://schemas.microsoft.com/office/drawing/2014/main" id="{D1289F40-7B12-36F7-B7ED-F90C2F764079}"/>
+              </a:ext>
+            </a:extLst>
+          </p:cNvPr>
+          <p:cNvPicPr>
+            <a:picLocks noChangeAspect="1" noChangeArrowheads="1"/>
+          </p:cNvPicPr>
+          <p:nvPr/>
+        </p:nvPicPr>
+        <p:blipFill>
+          <a:blip r:embed="rId3">
+            <a:extLst>
+              <a:ext uri="{28A0092B-C50C-407E-A947-70E740481C1C}">
+                <a14:useLocalDpi xmlns:a14="http://schemas.microsoft.com/office/drawing/2010/main" val="0"/>
+              </a:ext>
+            </a:extLst>
+          </a:blip>
+          <a:srcRect/>
+          <a:stretch>
+            <a:fillRect/>
+          </a:stretch>
+        </p:blipFill>
+        <p:spPr bwMode="auto">
+          <a:xfrm>
+            <a:off x="3725861" y="1531974"/>
+            <a:ext cx="1182739" cy="1433623"/>
+          </a:xfrm>
+          <a:prstGeom prst="rect">
+            <a:avLst/>
+          </a:prstGeom>
+          <a:noFill/>
+          <a:extLst>
+            <a:ext uri="{909E8E84-426E-40DD-AFC4-6F175D3DCCD1}">
+              <a14:hiddenFill xmlns:a14="http://schemas.microsoft.com/office/drawing/2010/main">
+                <a:solidFill>
+                  <a:srgbClr val="FFFFFF"/>
+                </a:solidFill>
+              </a14:hiddenFill>
+            </a:ext>
+          </a:extLst>
+        </p:spPr>
+      </p:pic>
+      <p:sp>
+        <p:nvSpPr>
+          <p:cNvPr id="2" name="右矢印 1">
+            <a:extLst>
+              <a:ext uri="{FF2B5EF4-FFF2-40B4-BE49-F238E27FC236}">
+                <a16:creationId xmlns:a16="http://schemas.microsoft.com/office/drawing/2014/main" id="{C6BD87E9-99D8-823E-4F16-21FFB3FC2002}"/>
+              </a:ext>
+            </a:extLst>
+          </p:cNvPr>
+          <p:cNvSpPr/>
+          <p:nvPr/>
+        </p:nvSpPr>
+        <p:spPr>
+          <a:xfrm>
+            <a:off x="5231219" y="2030819"/>
+            <a:ext cx="531627" cy="435935"/>
+          </a:xfrm>
+          <a:prstGeom prst="rightArrow">
+            <a:avLst/>
+          </a:prstGeom>
+          <a:solidFill>
+            <a:srgbClr val="FF0000"/>
+          </a:solidFill>
+        </p:spPr>
+        <p:style>
+          <a:lnRef idx="2">
+            <a:schemeClr val="accent1">
+              <a:shade val="15000"/>
+            </a:schemeClr>
+          </a:lnRef>
+          <a:fillRef idx="1">
+            <a:schemeClr val="accent1"/>
+          </a:fillRef>
+          <a:effectRef idx="0">
+            <a:schemeClr val="accent1"/>
+          </a:effectRef>
+          <a:fontRef idx="minor">
+            <a:schemeClr val="lt1"/>
+          </a:fontRef>
+        </p:style>
+        <p:txBody>
+          <a:bodyPr rtlCol="0" anchor="ctr"/>
+          <a:lstStyle/>
+          <a:p>
+            <a:pPr algn="ctr"/>
+            <a:endParaRPr kumimoji="1" lang="ja-JP" altLang="en-US"/>
+          </a:p>
+        </p:txBody>
+      </p:sp>
+      <p:sp>
+        <p:nvSpPr>
+          <p:cNvPr id="3" name="正方形/長方形 2">
+            <a:extLst>
+              <a:ext uri="{FF2B5EF4-FFF2-40B4-BE49-F238E27FC236}">
+                <a16:creationId xmlns:a16="http://schemas.microsoft.com/office/drawing/2014/main" id="{69E735E4-8FE7-B0C2-69D3-D088270AB1A6}"/>
+              </a:ext>
+            </a:extLst>
+          </p:cNvPr>
+          <p:cNvSpPr/>
+          <p:nvPr/>
+        </p:nvSpPr>
+        <p:spPr>
+          <a:xfrm>
+            <a:off x="2296943" y="1770320"/>
+            <a:ext cx="1318437" cy="893135"/>
+          </a:xfrm>
+          <a:prstGeom prst="rect">
+            <a:avLst/>
+          </a:prstGeom>
+          <a:solidFill>
+            <a:schemeClr val="bg1"/>
+          </a:solidFill>
+        </p:spPr>
+        <p:style>
+          <a:lnRef idx="2">
+            <a:schemeClr val="accent1">
+              <a:shade val="15000"/>
+            </a:schemeClr>
+          </a:lnRef>
+          <a:fillRef idx="1">
+            <a:schemeClr val="accent1"/>
+          </a:fillRef>
+          <a:effectRef idx="0">
+            <a:schemeClr val="accent1"/>
+          </a:effectRef>
+          <a:fontRef idx="minor">
+            <a:schemeClr val="lt1"/>
+          </a:fontRef>
+        </p:style>
+        <p:txBody>
+          <a:bodyPr rtlCol="0" anchor="ctr"/>
+          <a:lstStyle/>
+          <a:p>
+            <a:pPr algn="ctr"/>
+            <a:endParaRPr kumimoji="1" lang="ja-JP" altLang="en-US"/>
+          </a:p>
+        </p:txBody>
+      </p:sp>
+      <p:sp>
+        <p:nvSpPr>
+          <p:cNvPr id="8" name="フリーフォーム 7">
+            <a:extLst>
+              <a:ext uri="{FF2B5EF4-FFF2-40B4-BE49-F238E27FC236}">
+                <a16:creationId xmlns:a16="http://schemas.microsoft.com/office/drawing/2014/main" id="{A9AB866E-D982-49F3-9725-4E5D1246C181}"/>
+              </a:ext>
+            </a:extLst>
+          </p:cNvPr>
+          <p:cNvSpPr/>
+          <p:nvPr/>
+        </p:nvSpPr>
+        <p:spPr>
+          <a:xfrm>
+            <a:off x="6705302" y="1861288"/>
+            <a:ext cx="347710" cy="712381"/>
+          </a:xfrm>
+          <a:custGeom>
+            <a:avLst/>
+            <a:gdLst>
+              <a:gd name="csX0" fmla="*/ 425303 w 435935"/>
+              <a:gd name="csY0" fmla="*/ 350875 h 893135"/>
+              <a:gd name="csX1" fmla="*/ 435935 w 435935"/>
+              <a:gd name="csY1" fmla="*/ 265814 h 893135"/>
+              <a:gd name="csX2" fmla="*/ 425303 w 435935"/>
+              <a:gd name="csY2" fmla="*/ 223284 h 893135"/>
+              <a:gd name="csX3" fmla="*/ 404037 w 435935"/>
+              <a:gd name="csY3" fmla="*/ 127591 h 893135"/>
+              <a:gd name="csX4" fmla="*/ 382772 w 435935"/>
+              <a:gd name="csY4" fmla="*/ 85061 h 893135"/>
+              <a:gd name="csX5" fmla="*/ 361507 w 435935"/>
+              <a:gd name="csY5" fmla="*/ 53163 h 893135"/>
+              <a:gd name="csX6" fmla="*/ 255182 w 435935"/>
+              <a:gd name="csY6" fmla="*/ 0 h 893135"/>
+              <a:gd name="csX7" fmla="*/ 159489 w 435935"/>
+              <a:gd name="csY7" fmla="*/ 21265 h 893135"/>
+              <a:gd name="csX8" fmla="*/ 95693 w 435935"/>
+              <a:gd name="csY8" fmla="*/ 53163 h 893135"/>
+              <a:gd name="csX9" fmla="*/ 63796 w 435935"/>
+              <a:gd name="csY9" fmla="*/ 95693 h 893135"/>
+              <a:gd name="csX10" fmla="*/ 31898 w 435935"/>
+              <a:gd name="csY10" fmla="*/ 116958 h 893135"/>
+              <a:gd name="csX11" fmla="*/ 0 w 435935"/>
+              <a:gd name="csY11" fmla="*/ 180754 h 893135"/>
+              <a:gd name="csX12" fmla="*/ 10633 w 435935"/>
+              <a:gd name="csY12" fmla="*/ 308344 h 893135"/>
+              <a:gd name="csX13" fmla="*/ 63796 w 435935"/>
+              <a:gd name="csY13" fmla="*/ 404037 h 893135"/>
+              <a:gd name="csX14" fmla="*/ 95693 w 435935"/>
+              <a:gd name="csY14" fmla="*/ 414670 h 893135"/>
+              <a:gd name="csX15" fmla="*/ 223284 w 435935"/>
+              <a:gd name="csY15" fmla="*/ 404037 h 893135"/>
+              <a:gd name="csX16" fmla="*/ 287079 w 435935"/>
+              <a:gd name="csY16" fmla="*/ 382772 h 893135"/>
+              <a:gd name="csX17" fmla="*/ 318977 w 435935"/>
+              <a:gd name="csY17" fmla="*/ 372140 h 893135"/>
+              <a:gd name="csX18" fmla="*/ 350875 w 435935"/>
+              <a:gd name="csY18" fmla="*/ 350875 h 893135"/>
+              <a:gd name="csX19" fmla="*/ 382772 w 435935"/>
+              <a:gd name="csY19" fmla="*/ 340242 h 893135"/>
+              <a:gd name="csX20" fmla="*/ 361507 w 435935"/>
+              <a:gd name="csY20" fmla="*/ 372140 h 893135"/>
+              <a:gd name="csX21" fmla="*/ 308344 w 435935"/>
+              <a:gd name="csY21" fmla="*/ 457200 h 893135"/>
+              <a:gd name="csX22" fmla="*/ 265814 w 435935"/>
+              <a:gd name="csY22" fmla="*/ 499730 h 893135"/>
+              <a:gd name="csX23" fmla="*/ 244549 w 435935"/>
+              <a:gd name="csY23" fmla="*/ 531628 h 893135"/>
+              <a:gd name="csX24" fmla="*/ 212651 w 435935"/>
+              <a:gd name="csY24" fmla="*/ 574158 h 893135"/>
+              <a:gd name="csX25" fmla="*/ 191386 w 435935"/>
+              <a:gd name="csY25" fmla="*/ 616689 h 893135"/>
+              <a:gd name="csX26" fmla="*/ 159489 w 435935"/>
+              <a:gd name="csY26" fmla="*/ 659219 h 893135"/>
+              <a:gd name="csX27" fmla="*/ 106326 w 435935"/>
+              <a:gd name="csY27" fmla="*/ 744279 h 893135"/>
+              <a:gd name="csX28" fmla="*/ 42530 w 435935"/>
+              <a:gd name="csY28" fmla="*/ 839972 h 893135"/>
+              <a:gd name="csX29" fmla="*/ 10633 w 435935"/>
+              <a:gd name="csY29" fmla="*/ 893135 h 893135"/>
+            </a:gdLst>
+            <a:ahLst/>
+            <a:cxnLst>
+              <a:cxn ang="0">
+                <a:pos x="csX0" y="csY0"/>
+              </a:cxn>
+              <a:cxn ang="0">
+                <a:pos x="csX1" y="csY1"/>
+              </a:cxn>
+              <a:cxn ang="0">
+                <a:pos x="csX2" y="csY2"/>
+              </a:cxn>
+              <a:cxn ang="0">
+                <a:pos x="csX3" y="csY3"/>
+              </a:cxn>
+              <a:cxn ang="0">
+                <a:pos x="csX4" y="csY4"/>
+              </a:cxn>
+              <a:cxn ang="0">
+                <a:pos x="csX5" y="csY5"/>
+              </a:cxn>
+              <a:cxn ang="0">
+                <a:pos x="csX6" y="csY6"/>
+              </a:cxn>
+              <a:cxn ang="0">
+                <a:pos x="csX7" y="csY7"/>
+              </a:cxn>
+              <a:cxn ang="0">
+                <a:pos x="csX8" y="csY8"/>
+              </a:cxn>
+              <a:cxn ang="0">
+                <a:pos x="csX9" y="csY9"/>
+              </a:cxn>
+              <a:cxn ang="0">
+                <a:pos x="csX10" y="csY10"/>
+              </a:cxn>
+              <a:cxn ang="0">
+                <a:pos x="csX11" y="csY11"/>
+              </a:cxn>
+              <a:cxn ang="0">
+                <a:pos x="csX12" y="csY12"/>
+              </a:cxn>
+              <a:cxn ang="0">
+                <a:pos x="csX13" y="csY13"/>
+              </a:cxn>
+              <a:cxn ang="0">
+                <a:pos x="csX14" y="csY14"/>
+              </a:cxn>
+              <a:cxn ang="0">
+                <a:pos x="csX15" y="csY15"/>
+              </a:cxn>
+              <a:cxn ang="0">
+                <a:pos x="csX16" y="csY16"/>
+              </a:cxn>
+              <a:cxn ang="0">
+                <a:pos x="csX17" y="csY17"/>
+              </a:cxn>
+              <a:cxn ang="0">
+                <a:pos x="csX18" y="csY18"/>
+              </a:cxn>
+              <a:cxn ang="0">
+                <a:pos x="csX19" y="csY19"/>
+              </a:cxn>
+              <a:cxn ang="0">
+                <a:pos x="csX20" y="csY20"/>
+              </a:cxn>
+              <a:cxn ang="0">
+                <a:pos x="csX21" y="csY21"/>
+              </a:cxn>
+              <a:cxn ang="0">
+                <a:pos x="csX22" y="csY22"/>
+              </a:cxn>
+              <a:cxn ang="0">
+                <a:pos x="csX23" y="csY23"/>
+              </a:cxn>
+              <a:cxn ang="0">
+                <a:pos x="csX24" y="csY24"/>
+              </a:cxn>
+              <a:cxn ang="0">
+                <a:pos x="csX25" y="csY25"/>
+              </a:cxn>
+              <a:cxn ang="0">
+                <a:pos x="csX26" y="csY26"/>
+              </a:cxn>
+              <a:cxn ang="0">
+                <a:pos x="csX27" y="csY27"/>
+              </a:cxn>
+              <a:cxn ang="0">
+                <a:pos x="csX28" y="csY28"/>
+              </a:cxn>
+              <a:cxn ang="0">
+                <a:pos x="csX29" y="csY29"/>
+              </a:cxn>
+            </a:cxnLst>
+            <a:rect l="l" t="t" r="r" b="b"/>
+            <a:pathLst>
+              <a:path w="435935" h="893135">
+                <a:moveTo>
+                  <a:pt x="425303" y="350875"/>
+                </a:moveTo>
+                <a:cubicBezTo>
+                  <a:pt x="428847" y="322521"/>
+                  <a:pt x="435935" y="294388"/>
+                  <a:pt x="435935" y="265814"/>
+                </a:cubicBezTo>
+                <a:cubicBezTo>
+                  <a:pt x="435935" y="251201"/>
+                  <a:pt x="428473" y="237549"/>
+                  <a:pt x="425303" y="223284"/>
+                </a:cubicBezTo>
+                <a:cubicBezTo>
+                  <a:pt x="421628" y="206747"/>
+                  <a:pt x="411109" y="146451"/>
+                  <a:pt x="404037" y="127591"/>
+                </a:cubicBezTo>
+                <a:cubicBezTo>
+                  <a:pt x="398472" y="112750"/>
+                  <a:pt x="390636" y="98823"/>
+                  <a:pt x="382772" y="85061"/>
+                </a:cubicBezTo>
+                <a:cubicBezTo>
+                  <a:pt x="376432" y="73966"/>
+                  <a:pt x="371124" y="61578"/>
+                  <a:pt x="361507" y="53163"/>
+                </a:cubicBezTo>
+                <a:cubicBezTo>
+                  <a:pt x="310872" y="8857"/>
+                  <a:pt x="308030" y="13213"/>
+                  <a:pt x="255182" y="0"/>
+                </a:cubicBezTo>
+                <a:cubicBezTo>
+                  <a:pt x="230684" y="4083"/>
+                  <a:pt x="185662" y="8179"/>
+                  <a:pt x="159489" y="21265"/>
+                </a:cubicBezTo>
+                <a:cubicBezTo>
+                  <a:pt x="77038" y="62490"/>
+                  <a:pt x="175873" y="26435"/>
+                  <a:pt x="95693" y="53163"/>
+                </a:cubicBezTo>
+                <a:cubicBezTo>
+                  <a:pt x="85061" y="67340"/>
+                  <a:pt x="76326" y="83163"/>
+                  <a:pt x="63796" y="95693"/>
+                </a:cubicBezTo>
+                <a:cubicBezTo>
+                  <a:pt x="54760" y="104729"/>
+                  <a:pt x="40934" y="107922"/>
+                  <a:pt x="31898" y="116958"/>
+                </a:cubicBezTo>
+                <a:cubicBezTo>
+                  <a:pt x="11287" y="137569"/>
+                  <a:pt x="8648" y="154812"/>
+                  <a:pt x="0" y="180754"/>
+                </a:cubicBezTo>
+                <a:cubicBezTo>
+                  <a:pt x="3544" y="223284"/>
+                  <a:pt x="3617" y="266247"/>
+                  <a:pt x="10633" y="308344"/>
+                </a:cubicBezTo>
+                <a:cubicBezTo>
+                  <a:pt x="17569" y="349958"/>
+                  <a:pt x="28849" y="380739"/>
+                  <a:pt x="63796" y="404037"/>
+                </a:cubicBezTo>
+                <a:cubicBezTo>
+                  <a:pt x="73121" y="410254"/>
+                  <a:pt x="85061" y="411126"/>
+                  <a:pt x="95693" y="414670"/>
+                </a:cubicBezTo>
+                <a:cubicBezTo>
+                  <a:pt x="138223" y="411126"/>
+                  <a:pt x="181187" y="411053"/>
+                  <a:pt x="223284" y="404037"/>
+                </a:cubicBezTo>
+                <a:cubicBezTo>
+                  <a:pt x="245394" y="400352"/>
+                  <a:pt x="265814" y="389860"/>
+                  <a:pt x="287079" y="382772"/>
+                </a:cubicBezTo>
+                <a:lnTo>
+                  <a:pt x="318977" y="372140"/>
+                </a:lnTo>
+                <a:cubicBezTo>
+                  <a:pt x="329610" y="365052"/>
+                  <a:pt x="339445" y="356590"/>
+                  <a:pt x="350875" y="350875"/>
+                </a:cubicBezTo>
+                <a:cubicBezTo>
+                  <a:pt x="360899" y="345863"/>
+                  <a:pt x="377760" y="330218"/>
+                  <a:pt x="382772" y="340242"/>
+                </a:cubicBezTo>
+                <a:cubicBezTo>
+                  <a:pt x="388487" y="351672"/>
+                  <a:pt x="367847" y="361045"/>
+                  <a:pt x="361507" y="372140"/>
+                </a:cubicBezTo>
+                <a:cubicBezTo>
+                  <a:pt x="331917" y="423924"/>
+                  <a:pt x="350200" y="409365"/>
+                  <a:pt x="308344" y="457200"/>
+                </a:cubicBezTo>
+                <a:cubicBezTo>
+                  <a:pt x="295142" y="472288"/>
+                  <a:pt x="278862" y="484508"/>
+                  <a:pt x="265814" y="499730"/>
+                </a:cubicBezTo>
+                <a:cubicBezTo>
+                  <a:pt x="257498" y="509432"/>
+                  <a:pt x="251977" y="521229"/>
+                  <a:pt x="244549" y="531628"/>
+                </a:cubicBezTo>
+                <a:cubicBezTo>
+                  <a:pt x="234249" y="546048"/>
+                  <a:pt x="222043" y="559131"/>
+                  <a:pt x="212651" y="574158"/>
+                </a:cubicBezTo>
+                <a:cubicBezTo>
+                  <a:pt x="204250" y="587599"/>
+                  <a:pt x="199787" y="603248"/>
+                  <a:pt x="191386" y="616689"/>
+                </a:cubicBezTo>
+                <a:cubicBezTo>
+                  <a:pt x="181994" y="631716"/>
+                  <a:pt x="169789" y="644799"/>
+                  <a:pt x="159489" y="659219"/>
+                </a:cubicBezTo>
+                <a:cubicBezTo>
+                  <a:pt x="132619" y="696837"/>
+                  <a:pt x="135321" y="698714"/>
+                  <a:pt x="106326" y="744279"/>
+                </a:cubicBezTo>
+                <a:cubicBezTo>
+                  <a:pt x="106227" y="744435"/>
+                  <a:pt x="53214" y="823946"/>
+                  <a:pt x="42530" y="839972"/>
+                </a:cubicBezTo>
+                <a:cubicBezTo>
+                  <a:pt x="16872" y="878458"/>
+                  <a:pt x="26978" y="860444"/>
+                  <a:pt x="10633" y="893135"/>
+                </a:cubicBezTo>
+              </a:path>
+            </a:pathLst>
+          </a:custGeom>
+          <a:noFill/>
+          <a:ln w="57150"/>
+        </p:spPr>
+        <p:style>
+          <a:lnRef idx="2">
+            <a:schemeClr val="accent1">
+              <a:shade val="15000"/>
+            </a:schemeClr>
+          </a:lnRef>
+          <a:fillRef idx="1">
+            <a:schemeClr val="accent1"/>
+          </a:fillRef>
+          <a:effectRef idx="0">
+            <a:schemeClr val="accent1"/>
+          </a:effectRef>
+          <a:fontRef idx="minor">
+            <a:schemeClr val="lt1"/>
+          </a:fontRef>
+        </p:style>
+        <p:txBody>
+          <a:bodyPr rtlCol="0" anchor="ctr"/>
+          <a:lstStyle/>
+          <a:p>
+            <a:pPr algn="ctr"/>
+            <a:endParaRPr kumimoji="1" lang="ja-JP" altLang="en-US"/>
+          </a:p>
+        </p:txBody>
+      </p:sp>
+      <p:sp>
+        <p:nvSpPr>
+          <p:cNvPr id="9" name="テキスト ボックス 8">
+            <a:extLst>
+              <a:ext uri="{FF2B5EF4-FFF2-40B4-BE49-F238E27FC236}">
+                <a16:creationId xmlns:a16="http://schemas.microsoft.com/office/drawing/2014/main" id="{D00DBAA0-66F6-4F2F-CA0B-E15F29D690BC}"/>
+              </a:ext>
+            </a:extLst>
+          </p:cNvPr>
+          <p:cNvSpPr txBox="1"/>
+          <p:nvPr/>
+        </p:nvSpPr>
+        <p:spPr>
+          <a:xfrm>
+            <a:off x="2649827" y="1709055"/>
+            <a:ext cx="612668" cy="1015663"/>
+          </a:xfrm>
+          <a:prstGeom prst="rect">
+            <a:avLst/>
+          </a:prstGeom>
+          <a:noFill/>
+        </p:spPr>
+        <p:txBody>
+          <a:bodyPr wrap="none" rtlCol="0">
+            <a:spAutoFit/>
+          </a:bodyPr>
+          <a:lstStyle/>
+          <a:p>
+            <a:r>
+              <a:rPr kumimoji="1" lang="en-US" altLang="ja-JP" sz="6000" dirty="0"/>
+              <a:t>9</a:t>
+            </a:r>
+            <a:endParaRPr kumimoji="1" lang="ja-JP" altLang="en-US" sz="6000"/>
+          </a:p>
+        </p:txBody>
+      </p:sp>
+    </p:spTree>
+    <p:extLst>
+      <p:ext uri="{BB962C8B-B14F-4D97-AF65-F5344CB8AC3E}">
+        <p14:creationId xmlns:p14="http://schemas.microsoft.com/office/powerpoint/2010/main" val="3606821950"/>
       </p:ext>
     </p:extLst>
   </p:cSld>
